--- a/tissue_vs_glass/overview_tissue_vs_glass.pptx
+++ b/tissue_vs_glass/overview_tissue_vs_glass.pptx
@@ -107,6 +107,11 @@
       </a:defRPr>
     </a:lvl9pPr>
   </p:defaultTextStyle>
+  <p:extLst>
+    <p:ext uri="{EFAFB233-063F-42B5-8137-9DF3F51BA10A}">
+      <p15:sldGuideLst xmlns:p15="http://schemas.microsoft.com/office/powerpoint/2012/main"/>
+    </p:ext>
+  </p:extLst>
 </p:presentation>
 </file>
 
@@ -192,7 +197,7 @@
           <a:p>
             <a:fld id="{572CFEC4-4E45-284D-BF69-DE46D4CD8194}" type="datetimeFigureOut">
               <a:rPr lang="en-US" smtClean="0"/>
-              <a:t>3/5/25</a:t>
+              <a:t>4/22/25</a:t>
             </a:fld>
             <a:endParaRPr lang="en-US"/>
           </a:p>
@@ -679,7 +684,7 @@
           <a:p>
             <a:fld id="{00653A69-F55D-6944-9B3A-CF37B0944481}" type="datetimeFigureOut">
               <a:rPr lang="en-US" smtClean="0"/>
-              <a:t>3/5/25</a:t>
+              <a:t>4/22/25</a:t>
             </a:fld>
             <a:endParaRPr lang="en-US"/>
           </a:p>
@@ -849,7 +854,7 @@
           <a:p>
             <a:fld id="{00653A69-F55D-6944-9B3A-CF37B0944481}" type="datetimeFigureOut">
               <a:rPr lang="en-US" smtClean="0"/>
-              <a:t>3/5/25</a:t>
+              <a:t>4/22/25</a:t>
             </a:fld>
             <a:endParaRPr lang="en-US"/>
           </a:p>
@@ -1029,7 +1034,7 @@
           <a:p>
             <a:fld id="{00653A69-F55D-6944-9B3A-CF37B0944481}" type="datetimeFigureOut">
               <a:rPr lang="en-US" smtClean="0"/>
-              <a:t>3/5/25</a:t>
+              <a:t>4/22/25</a:t>
             </a:fld>
             <a:endParaRPr lang="en-US"/>
           </a:p>
@@ -1199,7 +1204,7 @@
           <a:p>
             <a:fld id="{00653A69-F55D-6944-9B3A-CF37B0944481}" type="datetimeFigureOut">
               <a:rPr lang="en-US" smtClean="0"/>
-              <a:t>3/5/25</a:t>
+              <a:t>4/22/25</a:t>
             </a:fld>
             <a:endParaRPr lang="en-US"/>
           </a:p>
@@ -1445,7 +1450,7 @@
           <a:p>
             <a:fld id="{00653A69-F55D-6944-9B3A-CF37B0944481}" type="datetimeFigureOut">
               <a:rPr lang="en-US" smtClean="0"/>
-              <a:t>3/5/25</a:t>
+              <a:t>4/22/25</a:t>
             </a:fld>
             <a:endParaRPr lang="en-US"/>
           </a:p>
@@ -1677,7 +1682,7 @@
           <a:p>
             <a:fld id="{00653A69-F55D-6944-9B3A-CF37B0944481}" type="datetimeFigureOut">
               <a:rPr lang="en-US" smtClean="0"/>
-              <a:t>3/5/25</a:t>
+              <a:t>4/22/25</a:t>
             </a:fld>
             <a:endParaRPr lang="en-US"/>
           </a:p>
@@ -2044,7 +2049,7 @@
           <a:p>
             <a:fld id="{00653A69-F55D-6944-9B3A-CF37B0944481}" type="datetimeFigureOut">
               <a:rPr lang="en-US" smtClean="0"/>
-              <a:t>3/5/25</a:t>
+              <a:t>4/22/25</a:t>
             </a:fld>
             <a:endParaRPr lang="en-US"/>
           </a:p>
@@ -2162,7 +2167,7 @@
           <a:p>
             <a:fld id="{00653A69-F55D-6944-9B3A-CF37B0944481}" type="datetimeFigureOut">
               <a:rPr lang="en-US" smtClean="0"/>
-              <a:t>3/5/25</a:t>
+              <a:t>4/22/25</a:t>
             </a:fld>
             <a:endParaRPr lang="en-US"/>
           </a:p>
@@ -2257,7 +2262,7 @@
           <a:p>
             <a:fld id="{00653A69-F55D-6944-9B3A-CF37B0944481}" type="datetimeFigureOut">
               <a:rPr lang="en-US" smtClean="0"/>
-              <a:t>3/5/25</a:t>
+              <a:t>4/22/25</a:t>
             </a:fld>
             <a:endParaRPr lang="en-US"/>
           </a:p>
@@ -2534,7 +2539,7 @@
           <a:p>
             <a:fld id="{00653A69-F55D-6944-9B3A-CF37B0944481}" type="datetimeFigureOut">
               <a:rPr lang="en-US" smtClean="0"/>
-              <a:t>3/5/25</a:t>
+              <a:t>4/22/25</a:t>
             </a:fld>
             <a:endParaRPr lang="en-US"/>
           </a:p>
@@ -2791,7 +2796,7 @@
           <a:p>
             <a:fld id="{00653A69-F55D-6944-9B3A-CF37B0944481}" type="datetimeFigureOut">
               <a:rPr lang="en-US" smtClean="0"/>
-              <a:t>3/5/25</a:t>
+              <a:t>4/22/25</a:t>
             </a:fld>
             <a:endParaRPr lang="en-US"/>
           </a:p>
@@ -3004,7 +3009,7 @@
           <a:p>
             <a:fld id="{00653A69-F55D-6944-9B3A-CF37B0944481}" type="datetimeFigureOut">
               <a:rPr lang="en-US" smtClean="0"/>
-              <a:t>3/5/25</a:t>
+              <a:t>4/22/25</a:t>
             </a:fld>
             <a:endParaRPr lang="en-US"/>
           </a:p>
@@ -3423,10 +3428,10 @@
         </p:nvGrpSpPr>
         <p:grpSpPr>
           <a:xfrm>
-            <a:off x="1280435" y="743485"/>
-            <a:ext cx="14865478" cy="12229030"/>
-            <a:chOff x="167254" y="444326"/>
-            <a:chExt cx="14865478" cy="12229030"/>
+            <a:off x="804846" y="485086"/>
+            <a:ext cx="16077022" cy="8903076"/>
+            <a:chOff x="-175405" y="-112471"/>
+            <a:chExt cx="16077022" cy="8903076"/>
           </a:xfrm>
         </p:grpSpPr>
         <p:sp>
@@ -3443,8 +3448,8 @@
           </p:nvSpPr>
           <p:spPr>
             <a:xfrm>
-              <a:off x="1295261" y="7763061"/>
-              <a:ext cx="6666481" cy="369333"/>
+              <a:off x="9122716" y="2715616"/>
+              <a:ext cx="6666481" cy="663223"/>
             </a:xfrm>
             <a:prstGeom prst="rect">
               <a:avLst/>
@@ -3514,7 +3519,55 @@
                     <a:schemeClr val="tx1"/>
                   </a:solidFill>
                 </a:rPr>
-                <a:t>&gt;.geojson</a:t>
+                <a:t>&gt;.</a:t>
+              </a:r>
+              <a:r>
+                <a:rPr lang="en-US" dirty="0" err="1">
+                  <a:solidFill>
+                    <a:schemeClr val="tx1"/>
+                  </a:solidFill>
+                </a:rPr>
+                <a:t>geojson</a:t>
+              </a:r>
+              <a:r>
+                <a:rPr lang="en-US" dirty="0">
+                  <a:solidFill>
+                    <a:schemeClr val="tx1"/>
+                  </a:solidFill>
+                </a:rPr>
+                <a:t> (</a:t>
+              </a:r>
+              <a:r>
+                <a:rPr lang="en-US" dirty="0" err="1">
+                  <a:solidFill>
+                    <a:schemeClr val="tx1"/>
+                  </a:solidFill>
+                </a:rPr>
+                <a:t>fe_si_models</a:t>
+              </a:r>
+              <a:r>
+                <a:rPr lang="en-US" dirty="0">
+                  <a:solidFill>
+                    <a:schemeClr val="tx1"/>
+                  </a:solidFill>
+                </a:rPr>
+                <a:t>/</a:t>
+              </a:r>
+              <a:r>
+                <a:rPr lang="en-US" dirty="0" err="1">
+                  <a:solidFill>
+                    <a:schemeClr val="tx1"/>
+                  </a:solidFill>
+                </a:rPr>
+                <a:t>content_vs_background</a:t>
+              </a:r>
+              <a:r>
+                <a:rPr lang="en-US" dirty="0">
+                  <a:solidFill>
+                    <a:schemeClr val="tx1"/>
+                  </a:solidFill>
+                </a:rPr>
+                <a:t>)</a:t>
               </a:r>
             </a:p>
           </p:txBody>
@@ -3533,7 +3586,7 @@
           </p:nvSpPr>
           <p:spPr>
             <a:xfrm>
-              <a:off x="1179072" y="12275028"/>
+              <a:off x="9030766" y="7523285"/>
               <a:ext cx="6870851" cy="398328"/>
             </a:xfrm>
             <a:prstGeom prst="rect">
@@ -3652,8 +3705,8 @@
           </p:nvSpPr>
           <p:spPr>
             <a:xfrm>
-              <a:off x="10094929" y="12289526"/>
-              <a:ext cx="3209124" cy="369332"/>
+              <a:off x="10615647" y="8392277"/>
+              <a:ext cx="3680618" cy="398328"/>
             </a:xfrm>
             <a:prstGeom prst="rect">
               <a:avLst/>
@@ -3689,13 +3742,16 @@
                     <a:schemeClr val="tx1"/>
                   </a:solidFill>
                 </a:rPr>
-                <a:t>validate_segmenation_model</a:t>
+                <a:t>validate_tissue_vs_glass</a:t>
               </a:r>
-              <a:endParaRPr lang="en-US" dirty="0">
-                <a:solidFill>
-                  <a:schemeClr val="tx1"/>
-                </a:solidFill>
-              </a:endParaRPr>
+              <a:r>
+                <a:rPr lang="en-US" dirty="0">
+                  <a:solidFill>
+                    <a:schemeClr val="tx1"/>
+                  </a:solidFill>
+                </a:rPr>
+                <a:t> (to do)</a:t>
+              </a:r>
             </a:p>
           </p:txBody>
         </p:sp>
@@ -3713,10 +3769,10 @@
           </p:nvGrpSpPr>
           <p:grpSpPr>
             <a:xfrm>
-              <a:off x="221038" y="444326"/>
-              <a:ext cx="10488183" cy="2482420"/>
-              <a:chOff x="239602" y="784591"/>
-              <a:chExt cx="10488183" cy="2482420"/>
+              <a:off x="-175405" y="-112471"/>
+              <a:ext cx="10488962" cy="2457444"/>
+              <a:chOff x="-156841" y="227794"/>
+              <a:chExt cx="10488962" cy="2457444"/>
             </a:xfrm>
           </p:grpSpPr>
           <p:sp>
@@ -3733,7 +3789,7 @@
             </p:nvSpPr>
             <p:spPr>
               <a:xfrm>
-                <a:off x="239602" y="1289425"/>
+                <a:off x="-156062" y="707652"/>
                 <a:ext cx="10488183" cy="1977586"/>
               </a:xfrm>
               <a:prstGeom prst="rect">
@@ -3780,7 +3836,7 @@
             </p:nvSpPr>
             <p:spPr>
               <a:xfrm>
-                <a:off x="2500539" y="1419765"/>
+                <a:off x="1878647" y="881038"/>
                 <a:ext cx="1117600" cy="369332"/>
               </a:xfrm>
               <a:prstGeom prst="rect">
@@ -3815,7 +3871,7 @@
             </p:nvSpPr>
             <p:spPr>
               <a:xfrm>
-                <a:off x="5070885" y="1426395"/>
+                <a:off x="4556779" y="938937"/>
                 <a:ext cx="1117600" cy="369332"/>
               </a:xfrm>
               <a:prstGeom prst="rect">
@@ -3850,7 +3906,7 @@
             </p:nvSpPr>
             <p:spPr>
               <a:xfrm>
-                <a:off x="2437447" y="2291292"/>
+                <a:off x="1860573" y="1797318"/>
                 <a:ext cx="1663700" cy="304800"/>
               </a:xfrm>
               <a:prstGeom prst="rect">
@@ -3906,7 +3962,7 @@
             </p:nvSpPr>
             <p:spPr>
               <a:xfrm>
-                <a:off x="2437447" y="1812466"/>
+                <a:off x="1878647" y="1298210"/>
                 <a:ext cx="1892300" cy="304800"/>
               </a:xfrm>
               <a:prstGeom prst="rect">
@@ -3978,7 +4034,7 @@
             </p:nvSpPr>
             <p:spPr>
               <a:xfrm>
-                <a:off x="5006092" y="1821932"/>
+                <a:off x="4528074" y="1308269"/>
                 <a:ext cx="1409700" cy="304800"/>
               </a:xfrm>
               <a:prstGeom prst="rect">
@@ -4041,7 +4097,7 @@
             </p:nvSpPr>
             <p:spPr>
               <a:xfrm>
-                <a:off x="288061" y="1370852"/>
+                <a:off x="-139008" y="881038"/>
                 <a:ext cx="1117600" cy="369332"/>
               </a:xfrm>
               <a:prstGeom prst="rect">
@@ -4076,7 +4132,7 @@
             </p:nvSpPr>
             <p:spPr>
               <a:xfrm>
-                <a:off x="330167" y="1793864"/>
+                <a:off x="-38138" y="1304058"/>
                 <a:ext cx="1663700" cy="304800"/>
               </a:xfrm>
               <a:prstGeom prst="rect">
@@ -4132,7 +4188,7 @@
             </p:nvSpPr>
             <p:spPr>
               <a:xfrm>
-                <a:off x="251150" y="784591"/>
+                <a:off x="-156841" y="227794"/>
                 <a:ext cx="1930073" cy="378413"/>
               </a:xfrm>
               <a:prstGeom prst="rect">
@@ -4167,7 +4223,7 @@
             </p:nvSpPr>
             <p:spPr>
               <a:xfrm>
-                <a:off x="5003675" y="2278218"/>
+                <a:off x="4507178" y="1830001"/>
                 <a:ext cx="1409700" cy="304800"/>
               </a:xfrm>
               <a:prstGeom prst="rect">
@@ -4214,65 +4270,6 @@
               </a:p>
             </p:txBody>
           </p:sp>
-          <p:sp>
-            <p:nvSpPr>
-              <p:cNvPr id="12" name="Rectangle 11">
-                <a:extLst>
-                  <a:ext uri="{FF2B5EF4-FFF2-40B4-BE49-F238E27FC236}">
-                    <a16:creationId xmlns:a16="http://schemas.microsoft.com/office/drawing/2014/main" id="{BFB725F7-E4A6-8C9A-0D5C-0CA3AA97E00E}"/>
-                  </a:ext>
-                </a:extLst>
-              </p:cNvPr>
-              <p:cNvSpPr/>
-              <p:nvPr/>
-            </p:nvSpPr>
-            <p:spPr>
-              <a:xfrm>
-                <a:off x="5003675" y="2795497"/>
-                <a:ext cx="1409700" cy="304800"/>
-              </a:xfrm>
-              <a:prstGeom prst="rect">
-                <a:avLst/>
-              </a:prstGeom>
-              <a:solidFill>
-                <a:schemeClr val="accent5">
-                  <a:lumMod val="20000"/>
-                  <a:lumOff val="80000"/>
-                </a:schemeClr>
-              </a:solidFill>
-            </p:spPr>
-            <p:style>
-              <a:lnRef idx="2">
-                <a:schemeClr val="accent1">
-                  <a:shade val="15000"/>
-                </a:schemeClr>
-              </a:lnRef>
-              <a:fillRef idx="1">
-                <a:schemeClr val="accent1"/>
-              </a:fillRef>
-              <a:effectRef idx="0">
-                <a:schemeClr val="accent1"/>
-              </a:effectRef>
-              <a:fontRef idx="minor">
-                <a:schemeClr val="lt1"/>
-              </a:fontRef>
-            </p:style>
-            <p:txBody>
-              <a:bodyPr rtlCol="0" anchor="ctr"/>
-              <a:lstStyle/>
-              <a:p>
-                <a:pPr algn="ctr"/>
-                <a:r>
-                  <a:rPr lang="en-US" dirty="0">
-                    <a:solidFill>
-                      <a:schemeClr val="tx1"/>
-                    </a:solidFill>
-                  </a:rPr>
-                  <a:t>tiff</a:t>
-                </a:r>
-              </a:p>
-            </p:txBody>
-          </p:sp>
         </p:grpSp>
         <p:sp>
           <p:nvSpPr>
@@ -4288,7 +4285,7 @@
           </p:nvSpPr>
           <p:spPr>
             <a:xfrm>
-              <a:off x="8366251" y="7754207"/>
+              <a:off x="441472" y="8379809"/>
               <a:ext cx="6666481" cy="369333"/>
             </a:xfrm>
             <a:prstGeom prst="rect">
@@ -4375,8 +4372,21 @@
                     <a:schemeClr val="tx1"/>
                   </a:solidFill>
                 </a:rPr>
-                <a:t>&gt;.geojson</a:t>
+                <a:t>&gt;.</a:t>
               </a:r>
+              <a:r>
+                <a:rPr lang="en-US" dirty="0" err="1">
+                  <a:solidFill>
+                    <a:schemeClr val="tx1"/>
+                  </a:solidFill>
+                </a:rPr>
+                <a:t>geojson</a:t>
+              </a:r>
+              <a:endParaRPr lang="en-US" dirty="0">
+                <a:solidFill>
+                  <a:schemeClr val="tx1"/>
+                </a:solidFill>
+              </a:endParaRPr>
             </a:p>
           </p:txBody>
         </p:sp>
@@ -4394,7 +4404,7 @@
           </p:nvSpPr>
           <p:spPr>
             <a:xfrm>
-              <a:off x="3782763" y="8590003"/>
+              <a:off x="11624106" y="3879683"/>
               <a:ext cx="1663700" cy="304800"/>
             </a:xfrm>
             <a:prstGeom prst="rect">
@@ -4455,7 +4465,7 @@
           </p:nvSpPr>
           <p:spPr>
             <a:xfrm>
-              <a:off x="3064233" y="9241911"/>
+              <a:off x="10905576" y="4576684"/>
               <a:ext cx="3100760" cy="304801"/>
             </a:xfrm>
             <a:prstGeom prst="rect">
@@ -4542,10 +4552,10 @@
           </p:nvGrpSpPr>
           <p:grpSpPr>
             <a:xfrm>
-              <a:off x="221038" y="5881621"/>
-              <a:ext cx="14811693" cy="1570441"/>
-              <a:chOff x="-609965" y="5821566"/>
-              <a:chExt cx="14811693" cy="1570441"/>
+              <a:off x="-175405" y="6054054"/>
+              <a:ext cx="7900236" cy="1694561"/>
+              <a:chOff x="-1006408" y="5993999"/>
+              <a:chExt cx="7900236" cy="1694561"/>
             </a:xfrm>
           </p:grpSpPr>
           <p:sp>
@@ -4562,7 +4572,7 @@
             </p:nvSpPr>
             <p:spPr>
               <a:xfrm>
-                <a:off x="9418844" y="6478326"/>
+                <a:off x="2084798" y="6613201"/>
                 <a:ext cx="2899291" cy="359742"/>
               </a:xfrm>
               <a:prstGeom prst="rect">
@@ -4623,7 +4633,7 @@
             </p:nvSpPr>
             <p:spPr>
               <a:xfrm>
-                <a:off x="-396856" y="6866287"/>
+                <a:off x="2047768" y="7113106"/>
                 <a:ext cx="2731005" cy="369332"/>
               </a:xfrm>
               <a:prstGeom prst="rect">
@@ -4660,7 +4670,7 @@
                       <a:schemeClr val="tx1"/>
                     </a:solidFill>
                   </a:rPr>
-                  <a:t>export_annotation</a:t>
+                  <a:t>export_tissue</a:t>
                 </a:r>
                 <a:endParaRPr lang="en-US" dirty="0">
                   <a:solidFill>
@@ -4684,7 +4694,7 @@
             </p:nvSpPr>
             <p:spPr>
               <a:xfrm>
-                <a:off x="-445139" y="6362072"/>
+                <a:off x="-846368" y="6636887"/>
                 <a:ext cx="2731004" cy="401264"/>
               </a:xfrm>
               <a:prstGeom prst="rect">
@@ -4745,8 +4755,8 @@
             </p:nvSpPr>
             <p:spPr>
               <a:xfrm>
-                <a:off x="-609965" y="6227688"/>
-                <a:ext cx="14811693" cy="1164319"/>
+                <a:off x="-1006408" y="6456964"/>
+                <a:ext cx="7900236" cy="1231596"/>
               </a:xfrm>
               <a:prstGeom prst="rect">
                 <a:avLst/>
@@ -4792,7 +4802,7 @@
             </p:nvSpPr>
             <p:spPr>
               <a:xfrm>
-                <a:off x="-609965" y="5821566"/>
+                <a:off x="-982429" y="5993999"/>
                 <a:ext cx="3344905" cy="369332"/>
               </a:xfrm>
               <a:prstGeom prst="rect">
@@ -4813,67 +4823,6 @@
               </a:p>
             </p:txBody>
           </p:sp>
-          <p:sp>
-            <p:nvSpPr>
-              <p:cNvPr id="139" name="Rectangle 138">
-                <a:extLst>
-                  <a:ext uri="{FF2B5EF4-FFF2-40B4-BE49-F238E27FC236}">
-                    <a16:creationId xmlns:a16="http://schemas.microsoft.com/office/drawing/2014/main" id="{24B40236-BF55-C2DF-35BD-854281CFBBDF}"/>
-                  </a:ext>
-                </a:extLst>
-              </p:cNvPr>
-              <p:cNvSpPr/>
-              <p:nvPr/>
-            </p:nvSpPr>
-            <p:spPr>
-              <a:xfrm>
-                <a:off x="2647664" y="6625064"/>
-                <a:ext cx="2299668" cy="369332"/>
-              </a:xfrm>
-              <a:prstGeom prst="rect">
-                <a:avLst/>
-              </a:prstGeom>
-              <a:solidFill>
-                <a:srgbClr val="A28F82"/>
-              </a:solidFill>
-            </p:spPr>
-            <p:style>
-              <a:lnRef idx="2">
-                <a:schemeClr val="accent1">
-                  <a:shade val="15000"/>
-                </a:schemeClr>
-              </a:lnRef>
-              <a:fillRef idx="1">
-                <a:schemeClr val="accent1"/>
-              </a:fillRef>
-              <a:effectRef idx="0">
-                <a:schemeClr val="accent1"/>
-              </a:effectRef>
-              <a:fontRef idx="minor">
-                <a:schemeClr val="lt1"/>
-              </a:fontRef>
-            </p:style>
-            <p:txBody>
-              <a:bodyPr rtlCol="0" anchor="ctr"/>
-              <a:lstStyle/>
-              <a:p>
-                <a:pPr algn="ctr"/>
-                <a:r>
-                  <a:rPr lang="en-US" dirty="0" err="1">
-                    <a:solidFill>
-                      <a:schemeClr val="tx1"/>
-                    </a:solidFill>
-                  </a:rPr>
-                  <a:t>create_content</a:t>
-                </a:r>
-                <a:endParaRPr lang="en-US" dirty="0">
-                  <a:solidFill>
-                    <a:schemeClr val="tx1"/>
-                  </a:solidFill>
-                </a:endParaRPr>
-              </a:p>
-            </p:txBody>
-          </p:sp>
         </p:grpSp>
         <p:grpSp>
           <p:nvGrpSpPr>
@@ -4889,94 +4838,12 @@
           </p:nvGrpSpPr>
           <p:grpSpPr>
             <a:xfrm>
-              <a:off x="202832" y="10059746"/>
-              <a:ext cx="8841769" cy="1585510"/>
-              <a:chOff x="-1215258" y="9851385"/>
-              <a:chExt cx="8841769" cy="1585510"/>
+              <a:off x="8694046" y="5641413"/>
+              <a:ext cx="4977800" cy="1038076"/>
+              <a:chOff x="7275956" y="5433052"/>
+              <a:chExt cx="4977800" cy="1038076"/>
             </a:xfrm>
           </p:grpSpPr>
-          <p:sp>
-            <p:nvSpPr>
-              <p:cNvPr id="91" name="Rectangle 90">
-                <a:extLst>
-                  <a:ext uri="{FF2B5EF4-FFF2-40B4-BE49-F238E27FC236}">
-                    <a16:creationId xmlns:a16="http://schemas.microsoft.com/office/drawing/2014/main" id="{E0464904-E95F-CCBA-6DDD-6B0B79B438C6}"/>
-                  </a:ext>
-                </a:extLst>
-              </p:cNvPr>
-              <p:cNvSpPr/>
-              <p:nvPr/>
-            </p:nvSpPr>
-            <p:spPr>
-              <a:xfrm>
-                <a:off x="-1197052" y="10272596"/>
-                <a:ext cx="8823563" cy="1164299"/>
-              </a:xfrm>
-              <a:prstGeom prst="rect">
-                <a:avLst/>
-              </a:prstGeom>
-              <a:noFill/>
-            </p:spPr>
-            <p:style>
-              <a:lnRef idx="2">
-                <a:schemeClr val="accent1">
-                  <a:shade val="15000"/>
-                </a:schemeClr>
-              </a:lnRef>
-              <a:fillRef idx="1">
-                <a:schemeClr val="accent1"/>
-              </a:fillRef>
-              <a:effectRef idx="0">
-                <a:schemeClr val="accent1"/>
-              </a:effectRef>
-              <a:fontRef idx="minor">
-                <a:schemeClr val="lt1"/>
-              </a:fontRef>
-            </p:style>
-            <p:txBody>
-              <a:bodyPr rtlCol="0" anchor="ctr"/>
-              <a:lstStyle/>
-              <a:p>
-                <a:pPr algn="ctr"/>
-                <a:endParaRPr lang="en-US" dirty="0"/>
-              </a:p>
-            </p:txBody>
-          </p:sp>
-          <p:sp>
-            <p:nvSpPr>
-              <p:cNvPr id="92" name="TextBox 91">
-                <a:extLst>
-                  <a:ext uri="{FF2B5EF4-FFF2-40B4-BE49-F238E27FC236}">
-                    <a16:creationId xmlns:a16="http://schemas.microsoft.com/office/drawing/2014/main" id="{E3B9162B-A144-898B-CA01-5311CF12FE9B}"/>
-                  </a:ext>
-                </a:extLst>
-              </p:cNvPr>
-              <p:cNvSpPr txBox="1"/>
-              <p:nvPr/>
-            </p:nvSpPr>
-            <p:spPr>
-              <a:xfrm>
-                <a:off x="-1215258" y="9851385"/>
-                <a:ext cx="3344905" cy="369332"/>
-              </a:xfrm>
-              <a:prstGeom prst="rect">
-                <a:avLst/>
-              </a:prstGeom>
-              <a:noFill/>
-            </p:spPr>
-            <p:txBody>
-              <a:bodyPr wrap="square" rtlCol="0">
-                <a:spAutoFit/>
-              </a:bodyPr>
-              <a:lstStyle/>
-              <a:p>
-                <a:r>
-                  <a:rPr lang="en-US" b="1" dirty="0"/>
-                  <a:t>Create validation set</a:t>
-                </a:r>
-              </a:p>
-            </p:txBody>
-          </p:sp>
           <p:sp>
             <p:nvSpPr>
               <p:cNvPr id="134" name="Rectangle 133">
@@ -4991,7 +4858,7 @@
             </p:nvSpPr>
             <p:spPr>
               <a:xfrm>
-                <a:off x="3116868" y="11005882"/>
+                <a:off x="9924161" y="6101797"/>
                 <a:ext cx="2329595" cy="369331"/>
               </a:xfrm>
               <a:prstGeom prst="rect">
@@ -5028,7 +4895,7 @@
                       <a:schemeClr val="tx1"/>
                     </a:solidFill>
                   </a:rPr>
-                  <a:t>export_annotation</a:t>
+                  <a:t>export_annotated_roi</a:t>
                 </a:r>
                 <a:endParaRPr lang="en-US" dirty="0">
                   <a:solidFill>
@@ -5052,7 +4919,7 @@
             </p:nvSpPr>
             <p:spPr>
               <a:xfrm>
-                <a:off x="469396" y="10474744"/>
+                <a:off x="7275956" y="5433052"/>
                 <a:ext cx="2387009" cy="336511"/>
               </a:xfrm>
               <a:prstGeom prst="rect">
@@ -5113,7 +4980,7 @@
             </p:nvSpPr>
             <p:spPr>
               <a:xfrm>
-                <a:off x="3196408" y="10438203"/>
+                <a:off x="10014672" y="5487471"/>
                 <a:ext cx="2148574" cy="369331"/>
               </a:xfrm>
               <a:prstGeom prst="rect">
@@ -5150,7 +5017,7 @@
                       <a:schemeClr val="tx1"/>
                     </a:solidFill>
                   </a:rPr>
-                  <a:t>import_annotation</a:t>
+                  <a:t>import_roi</a:t>
                 </a:r>
                 <a:endParaRPr lang="en-US" dirty="0">
                   <a:solidFill>
@@ -5175,55 +5042,12 @@
           </p:nvGrpSpPr>
           <p:grpSpPr>
             <a:xfrm>
-              <a:off x="167254" y="3711425"/>
-              <a:ext cx="13097405" cy="2318007"/>
-              <a:chOff x="-2095385" y="3549531"/>
-              <a:chExt cx="13097405" cy="2318007"/>
+              <a:off x="-175405" y="2959881"/>
+              <a:ext cx="7868878" cy="2847350"/>
+              <a:chOff x="-2438044" y="2797987"/>
+              <a:chExt cx="7868878" cy="2847350"/>
             </a:xfrm>
           </p:grpSpPr>
-          <p:cxnSp>
-            <p:nvCxnSpPr>
-              <p:cNvPr id="22" name="Straight Arrow Connector 21">
-                <a:extLst>
-                  <a:ext uri="{FF2B5EF4-FFF2-40B4-BE49-F238E27FC236}">
-                    <a16:creationId xmlns:a16="http://schemas.microsoft.com/office/drawing/2014/main" id="{5839C5A3-7BEE-7FD8-AD58-0BAE0DCC41AF}"/>
-                  </a:ext>
-                </a:extLst>
-              </p:cNvPr>
-              <p:cNvCxnSpPr>
-                <a:cxnSpLocks/>
-                <a:stCxn id="69" idx="2"/>
-                <a:endCxn id="78" idx="0"/>
-              </p:cNvCxnSpPr>
-              <p:nvPr/>
-            </p:nvCxnSpPr>
-            <p:spPr>
-              <a:xfrm>
-                <a:off x="2351975" y="5079780"/>
-                <a:ext cx="12994" cy="467739"/>
-              </a:xfrm>
-              <a:prstGeom prst="straightConnector1">
-                <a:avLst/>
-              </a:prstGeom>
-              <a:ln>
-                <a:tailEnd type="triangle"/>
-              </a:ln>
-            </p:spPr>
-            <p:style>
-              <a:lnRef idx="2">
-                <a:schemeClr val="accent1"/>
-              </a:lnRef>
-              <a:fillRef idx="0">
-                <a:schemeClr val="accent1"/>
-              </a:fillRef>
-              <a:effectRef idx="1">
-                <a:schemeClr val="accent1"/>
-              </a:effectRef>
-              <a:fontRef idx="minor">
-                <a:schemeClr val="tx1"/>
-              </a:fontRef>
-            </p:style>
-          </p:cxnSp>
           <p:sp>
             <p:nvSpPr>
               <p:cNvPr id="45" name="Rectangle 44">
@@ -5238,8 +5062,8 @@
             </p:nvSpPr>
             <p:spPr>
               <a:xfrm>
-                <a:off x="-2041601" y="3930929"/>
-                <a:ext cx="13043621" cy="1476824"/>
+                <a:off x="-2420211" y="3372920"/>
+                <a:ext cx="7851045" cy="1419465"/>
               </a:xfrm>
               <a:prstGeom prst="rect">
                 <a:avLst/>
@@ -5285,7 +5109,7 @@
             </p:nvSpPr>
             <p:spPr>
               <a:xfrm>
-                <a:off x="-269246" y="4137290"/>
+                <a:off x="-2278004" y="3558074"/>
                 <a:ext cx="5049099" cy="356406"/>
               </a:xfrm>
               <a:prstGeom prst="rect">
@@ -5346,7 +5170,7 @@
             </p:nvSpPr>
             <p:spPr>
               <a:xfrm>
-                <a:off x="-2095385" y="3549531"/>
+                <a:off x="-2438044" y="2797987"/>
                 <a:ext cx="3344905" cy="369332"/>
               </a:xfrm>
               <a:prstGeom prst="rect">
@@ -5362,17 +5186,17 @@
               <a:p>
                 <a:r>
                   <a:rPr lang="en-US" b="1" dirty="0"/>
-                  <a:t>Create models</a:t>
+                  <a:t>Create model</a:t>
                 </a:r>
               </a:p>
             </p:txBody>
           </p:sp>
           <p:sp>
             <p:nvSpPr>
-              <p:cNvPr id="69" name="Rectangle 68">
+              <p:cNvPr id="142" name="Rectangle 141">
                 <a:extLst>
                   <a:ext uri="{FF2B5EF4-FFF2-40B4-BE49-F238E27FC236}">
-                    <a16:creationId xmlns:a16="http://schemas.microsoft.com/office/drawing/2014/main" id="{F90A7B6D-3707-3201-A15C-5A2035C48A0C}"/>
+                    <a16:creationId xmlns:a16="http://schemas.microsoft.com/office/drawing/2014/main" id="{1D2D5B14-4016-1854-EAD2-79DA15C59ADD}"/>
                   </a:ext>
                 </a:extLst>
               </p:cNvPr>
@@ -5381,8 +5205,8 @@
             </p:nvSpPr>
             <p:spPr>
               <a:xfrm>
-                <a:off x="-172575" y="4723374"/>
-                <a:ext cx="5049099" cy="356406"/>
+                <a:off x="-2249656" y="4090557"/>
+                <a:ext cx="2660876" cy="403718"/>
               </a:xfrm>
               <a:prstGeom prst="rect">
                 <a:avLst/>
@@ -5430,10 +5254,10 @@
           </p:sp>
           <p:sp>
             <p:nvSpPr>
-              <p:cNvPr id="78" name="Rectangle 77">
+              <p:cNvPr id="150" name="Rectangle 149">
                 <a:extLst>
                   <a:ext uri="{FF2B5EF4-FFF2-40B4-BE49-F238E27FC236}">
-                    <a16:creationId xmlns:a16="http://schemas.microsoft.com/office/drawing/2014/main" id="{600419FF-87CC-0523-3099-18A0C9A5BF36}"/>
+                    <a16:creationId xmlns:a16="http://schemas.microsoft.com/office/drawing/2014/main" id="{E5568FE6-7D36-ED39-C39B-825610E00FDD}"/>
                   </a:ext>
                 </a:extLst>
               </p:cNvPr>
@@ -5442,8 +5266,8 @@
             </p:nvSpPr>
             <p:spPr>
               <a:xfrm>
-                <a:off x="1216028" y="5547519"/>
-                <a:ext cx="2297881" cy="267331"/>
+                <a:off x="356370" y="5378005"/>
+                <a:ext cx="2297881" cy="267332"/>
               </a:xfrm>
               <a:prstGeom prst="rect">
                 <a:avLst/>
@@ -5484,128 +5308,6 @@
               </a:p>
             </p:txBody>
           </p:sp>
-          <p:sp>
-            <p:nvSpPr>
-              <p:cNvPr id="142" name="Rectangle 141">
-                <a:extLst>
-                  <a:ext uri="{FF2B5EF4-FFF2-40B4-BE49-F238E27FC236}">
-                    <a16:creationId xmlns:a16="http://schemas.microsoft.com/office/drawing/2014/main" id="{1D2D5B14-4016-1854-EAD2-79DA15C59ADD}"/>
-                  </a:ext>
-                </a:extLst>
-              </p:cNvPr>
-              <p:cNvSpPr/>
-              <p:nvPr/>
-            </p:nvSpPr>
-            <p:spPr>
-              <a:xfrm>
-                <a:off x="8110183" y="4379307"/>
-                <a:ext cx="2660876" cy="403718"/>
-              </a:xfrm>
-              <a:prstGeom prst="rect">
-                <a:avLst/>
-              </a:prstGeom>
-              <a:solidFill>
-                <a:srgbClr val="FFBA00"/>
-              </a:solidFill>
-            </p:spPr>
-            <p:style>
-              <a:lnRef idx="2">
-                <a:schemeClr val="accent1">
-                  <a:shade val="15000"/>
-                </a:schemeClr>
-              </a:lnRef>
-              <a:fillRef idx="1">
-                <a:schemeClr val="accent1"/>
-              </a:fillRef>
-              <a:effectRef idx="0">
-                <a:schemeClr val="accent1"/>
-              </a:effectRef>
-              <a:fontRef idx="minor">
-                <a:schemeClr val="lt1"/>
-              </a:fontRef>
-            </p:style>
-            <p:txBody>
-              <a:bodyPr rtlCol="0" anchor="ctr"/>
-              <a:lstStyle/>
-              <a:p>
-                <a:pPr algn="ctr"/>
-                <a:r>
-                  <a:rPr lang="en-US" dirty="0" err="1">
-                    <a:solidFill>
-                      <a:schemeClr val="tx1"/>
-                    </a:solidFill>
-                  </a:rPr>
-                  <a:t>create_pixel_thresholder</a:t>
-                </a:r>
-                <a:endParaRPr lang="en-US" dirty="0">
-                  <a:solidFill>
-                    <a:schemeClr val="tx1"/>
-                  </a:solidFill>
-                </a:endParaRPr>
-              </a:p>
-            </p:txBody>
-          </p:sp>
-          <p:sp>
-            <p:nvSpPr>
-              <p:cNvPr id="150" name="Rectangle 149">
-                <a:extLst>
-                  <a:ext uri="{FF2B5EF4-FFF2-40B4-BE49-F238E27FC236}">
-                    <a16:creationId xmlns:a16="http://schemas.microsoft.com/office/drawing/2014/main" id="{E5568FE6-7D36-ED39-C39B-825610E00FDD}"/>
-                  </a:ext>
-                </a:extLst>
-              </p:cNvPr>
-              <p:cNvSpPr/>
-              <p:nvPr/>
-            </p:nvSpPr>
-            <p:spPr>
-              <a:xfrm>
-                <a:off x="8291680" y="5600207"/>
-                <a:ext cx="2297881" cy="267331"/>
-              </a:xfrm>
-              <a:prstGeom prst="rect">
-                <a:avLst/>
-              </a:prstGeom>
-              <a:solidFill>
-                <a:srgbClr val="FAF0E6"/>
-              </a:solidFill>
-            </p:spPr>
-            <p:style>
-              <a:lnRef idx="2">
-                <a:schemeClr val="accent1">
-                  <a:shade val="15000"/>
-                </a:schemeClr>
-              </a:lnRef>
-              <a:fillRef idx="1">
-                <a:schemeClr val="accent1"/>
-              </a:fillRef>
-              <a:effectRef idx="0">
-                <a:schemeClr val="accent1"/>
-              </a:effectRef>
-              <a:fontRef idx="minor">
-                <a:schemeClr val="lt1"/>
-              </a:fontRef>
-            </p:style>
-            <p:txBody>
-              <a:bodyPr rtlCol="0" anchor="ctr"/>
-              <a:lstStyle/>
-              <a:p>
-                <a:pPr algn="ctr"/>
-                <a:r>
-                  <a:rPr lang="en-US" dirty="0" err="1">
-                    <a:solidFill>
-                      <a:schemeClr val="tx1"/>
-                    </a:solidFill>
-                  </a:rPr>
-                  <a:t>detect_content</a:t>
-                </a:r>
-                <a:endParaRPr lang="en-US" dirty="0">
-                  <a:solidFill>
-                    <a:schemeClr val="tx1"/>
-                  </a:solidFill>
-                </a:endParaRPr>
-              </a:p>
-            </p:txBody>
-          </p:sp>
           <p:cxnSp>
             <p:nvCxnSpPr>
               <p:cNvPr id="153" name="Straight Arrow Connector 152">
@@ -5617,15 +5319,15 @@
               </p:cNvPr>
               <p:cNvCxnSpPr>
                 <a:cxnSpLocks/>
-                <a:stCxn id="142" idx="2"/>
+                <a:stCxn id="45" idx="2"/>
                 <a:endCxn id="150" idx="0"/>
               </p:cNvCxnSpPr>
               <p:nvPr/>
             </p:nvCxnSpPr>
             <p:spPr>
-              <a:xfrm>
-                <a:off x="9440621" y="4783025"/>
-                <a:ext cx="0" cy="817182"/>
+              <a:xfrm flipH="1">
+                <a:off x="1505311" y="4792385"/>
+                <a:ext cx="1" cy="585620"/>
               </a:xfrm>
               <a:prstGeom prst="straightConnector1">
                 <a:avLst/>
@@ -5660,183 +5362,16 @@
               </a:extLst>
             </p:cNvPr>
             <p:cNvCxnSpPr>
-              <a:stCxn id="78" idx="2"/>
-              <a:endCxn id="139" idx="0"/>
+              <a:cxnSpLocks/>
+              <a:stCxn id="150" idx="2"/>
+              <a:endCxn id="85" idx="0"/>
             </p:cNvCxnSpPr>
             <p:nvPr/>
           </p:nvCxnSpPr>
           <p:spPr>
             <a:xfrm>
-              <a:off x="4627608" y="5976744"/>
-              <a:ext cx="893" cy="708375"/>
-            </a:xfrm>
-            <a:prstGeom prst="straightConnector1">
-              <a:avLst/>
-            </a:prstGeom>
-            <a:ln>
-              <a:tailEnd type="triangle"/>
-            </a:ln>
-          </p:spPr>
-          <p:style>
-            <a:lnRef idx="2">
-              <a:schemeClr val="accent1"/>
-            </a:lnRef>
-            <a:fillRef idx="0">
-              <a:schemeClr val="accent1"/>
-            </a:fillRef>
-            <a:effectRef idx="1">
-              <a:schemeClr val="accent1"/>
-            </a:effectRef>
-            <a:fontRef idx="minor">
-              <a:schemeClr val="tx1"/>
-            </a:fontRef>
-          </p:style>
-        </p:cxnSp>
-        <p:cxnSp>
-          <p:nvCxnSpPr>
-            <p:cNvPr id="165" name="Straight Arrow Connector 164">
-              <a:extLst>
-                <a:ext uri="{FF2B5EF4-FFF2-40B4-BE49-F238E27FC236}">
-                  <a16:creationId xmlns:a16="http://schemas.microsoft.com/office/drawing/2014/main" id="{A24167AB-C322-C1F0-80C0-2CBB2909F09E}"/>
-                </a:ext>
-              </a:extLst>
-            </p:cNvPr>
-            <p:cNvCxnSpPr>
-              <a:stCxn id="150" idx="2"/>
-              <a:endCxn id="43" idx="0"/>
-            </p:cNvCxnSpPr>
-            <p:nvPr/>
-          </p:nvCxnSpPr>
-          <p:spPr>
-            <a:xfrm flipH="1">
-              <a:off x="11699493" y="6029432"/>
-              <a:ext cx="3767" cy="508949"/>
-            </a:xfrm>
-            <a:prstGeom prst="straightConnector1">
-              <a:avLst/>
-            </a:prstGeom>
-            <a:ln>
-              <a:tailEnd type="triangle"/>
-            </a:ln>
-          </p:spPr>
-          <p:style>
-            <a:lnRef idx="2">
-              <a:schemeClr val="accent1"/>
-            </a:lnRef>
-            <a:fillRef idx="0">
-              <a:schemeClr val="accent1"/>
-            </a:fillRef>
-            <a:effectRef idx="1">
-              <a:schemeClr val="accent1"/>
-            </a:effectRef>
-            <a:fontRef idx="minor">
-              <a:schemeClr val="tx1"/>
-            </a:fontRef>
-          </p:style>
-        </p:cxnSp>
-        <p:cxnSp>
-          <p:nvCxnSpPr>
-            <p:cNvPr id="177" name="Straight Arrow Connector 176">
-              <a:extLst>
-                <a:ext uri="{FF2B5EF4-FFF2-40B4-BE49-F238E27FC236}">
-                  <a16:creationId xmlns:a16="http://schemas.microsoft.com/office/drawing/2014/main" id="{3226EDD5-FFEA-3371-812B-3684F93C5559}"/>
-                </a:ext>
-              </a:extLst>
-            </p:cNvPr>
-            <p:cNvCxnSpPr>
-              <a:stCxn id="139" idx="2"/>
-              <a:endCxn id="19" idx="0"/>
-            </p:cNvCxnSpPr>
-            <p:nvPr/>
-          </p:nvCxnSpPr>
-          <p:spPr>
-            <a:xfrm>
-              <a:off x="4628501" y="7054451"/>
-              <a:ext cx="1" cy="708610"/>
-            </a:xfrm>
-            <a:prstGeom prst="straightConnector1">
-              <a:avLst/>
-            </a:prstGeom>
-            <a:ln>
-              <a:tailEnd type="triangle"/>
-            </a:ln>
-          </p:spPr>
-          <p:style>
-            <a:lnRef idx="2">
-              <a:schemeClr val="accent1"/>
-            </a:lnRef>
-            <a:fillRef idx="0">
-              <a:schemeClr val="accent1"/>
-            </a:fillRef>
-            <a:effectRef idx="1">
-              <a:schemeClr val="accent1"/>
-            </a:effectRef>
-            <a:fontRef idx="minor">
-              <a:schemeClr val="tx1"/>
-            </a:fontRef>
-          </p:style>
-        </p:cxnSp>
-        <p:cxnSp>
-          <p:nvCxnSpPr>
-            <p:cNvPr id="179" name="Straight Arrow Connector 178">
-              <a:extLst>
-                <a:ext uri="{FF2B5EF4-FFF2-40B4-BE49-F238E27FC236}">
-                  <a16:creationId xmlns:a16="http://schemas.microsoft.com/office/drawing/2014/main" id="{A13B7C5D-C50A-00DA-00D3-DAF7343DB35F}"/>
-                </a:ext>
-              </a:extLst>
-            </p:cNvPr>
-            <p:cNvCxnSpPr>
-              <a:stCxn id="43" idx="2"/>
-              <a:endCxn id="97" idx="0"/>
-            </p:cNvCxnSpPr>
-            <p:nvPr/>
-          </p:nvCxnSpPr>
-          <p:spPr>
-            <a:xfrm flipH="1">
-              <a:off x="11699492" y="6898123"/>
-              <a:ext cx="1" cy="856084"/>
-            </a:xfrm>
-            <a:prstGeom prst="straightConnector1">
-              <a:avLst/>
-            </a:prstGeom>
-            <a:ln>
-              <a:tailEnd type="triangle"/>
-            </a:ln>
-          </p:spPr>
-          <p:style>
-            <a:lnRef idx="2">
-              <a:schemeClr val="accent1"/>
-            </a:lnRef>
-            <a:fillRef idx="0">
-              <a:schemeClr val="accent1"/>
-            </a:fillRef>
-            <a:effectRef idx="1">
-              <a:schemeClr val="accent1"/>
-            </a:effectRef>
-            <a:fontRef idx="minor">
-              <a:schemeClr val="tx1"/>
-            </a:fontRef>
-          </p:style>
-        </p:cxnSp>
-        <p:cxnSp>
-          <p:nvCxnSpPr>
-            <p:cNvPr id="183" name="Straight Arrow Connector 182">
-              <a:extLst>
-                <a:ext uri="{FF2B5EF4-FFF2-40B4-BE49-F238E27FC236}">
-                  <a16:creationId xmlns:a16="http://schemas.microsoft.com/office/drawing/2014/main" id="{8EA4DF14-CDAE-F654-8B2C-ACD5DE130626}"/>
-                </a:ext>
-              </a:extLst>
-            </p:cNvPr>
-            <p:cNvCxnSpPr>
-              <a:cxnSpLocks/>
-              <a:stCxn id="19" idx="2"/>
-            </p:cNvCxnSpPr>
-            <p:nvPr/>
-          </p:nvCxnSpPr>
-          <p:spPr>
-            <a:xfrm>
-              <a:off x="4628502" y="8132394"/>
-              <a:ext cx="0" cy="415356"/>
+              <a:off x="3767950" y="5807231"/>
+              <a:ext cx="6763" cy="709788"/>
             </a:xfrm>
             <a:prstGeom prst="straightConnector1">
               <a:avLst/>
@@ -5877,8 +5412,8 @@
           </p:nvCxnSpPr>
           <p:spPr>
             <a:xfrm>
-              <a:off x="4614613" y="8894803"/>
-              <a:ext cx="0" cy="347108"/>
+              <a:off x="12455956" y="4184483"/>
+              <a:ext cx="0" cy="392201"/>
             </a:xfrm>
             <a:prstGeom prst="straightConnector1">
               <a:avLst/>
@@ -5914,14 +5449,14 @@
             <p:cNvCxnSpPr>
               <a:cxnSpLocks/>
               <a:stCxn id="120" idx="2"/>
-              <a:endCxn id="91" idx="0"/>
+              <a:endCxn id="72" idx="0"/>
             </p:cNvCxnSpPr>
             <p:nvPr/>
           </p:nvCxnSpPr>
           <p:spPr>
             <a:xfrm>
-              <a:off x="4614613" y="9546712"/>
-              <a:ext cx="18207" cy="934245"/>
+              <a:off x="12455956" y="4881485"/>
+              <a:ext cx="0" cy="579473"/>
             </a:xfrm>
             <a:prstGeom prst="straightConnector1">
               <a:avLst/>
@@ -5956,15 +5491,15 @@
             </p:cNvPr>
             <p:cNvCxnSpPr>
               <a:cxnSpLocks/>
-              <a:stCxn id="91" idx="2"/>
+              <a:stCxn id="72" idx="2"/>
               <a:endCxn id="34" idx="0"/>
             </p:cNvCxnSpPr>
             <p:nvPr/>
           </p:nvCxnSpPr>
           <p:spPr>
-            <a:xfrm flipH="1">
-              <a:off x="4614498" y="11645256"/>
-              <a:ext cx="18322" cy="629772"/>
+            <a:xfrm>
+              <a:off x="12455956" y="6880423"/>
+              <a:ext cx="10236" cy="642862"/>
             </a:xfrm>
             <a:prstGeom prst="straightConnector1">
               <a:avLst/>
@@ -5998,15 +5533,16 @@
               </a:extLst>
             </p:cNvPr>
             <p:cNvCxnSpPr>
-              <a:stCxn id="97" idx="2"/>
-              <a:endCxn id="8" idx="0"/>
+              <a:cxnSpLocks/>
+              <a:stCxn id="97" idx="3"/>
+              <a:endCxn id="8" idx="1"/>
             </p:cNvCxnSpPr>
             <p:nvPr/>
           </p:nvCxnSpPr>
           <p:spPr>
-            <a:xfrm flipH="1">
-              <a:off x="11699491" y="8123540"/>
-              <a:ext cx="1" cy="4165986"/>
+            <a:xfrm>
+              <a:off x="7107953" y="8564476"/>
+              <a:ext cx="3507694" cy="26965"/>
             </a:xfrm>
             <a:prstGeom prst="straightConnector1">
               <a:avLst/>
@@ -6040,15 +5576,16 @@
               </a:extLst>
             </p:cNvPr>
             <p:cNvCxnSpPr>
-              <a:stCxn id="34" idx="3"/>
-              <a:endCxn id="8" idx="1"/>
+              <a:cxnSpLocks/>
+              <a:stCxn id="34" idx="2"/>
+              <a:endCxn id="8" idx="0"/>
             </p:cNvCxnSpPr>
             <p:nvPr/>
           </p:nvCxnSpPr>
           <p:spPr>
-            <a:xfrm>
-              <a:off x="8049923" y="12474192"/>
-              <a:ext cx="2045006" cy="0"/>
+            <a:xfrm flipH="1">
+              <a:off x="12455956" y="7921613"/>
+              <a:ext cx="10236" cy="470664"/>
             </a:xfrm>
             <a:prstGeom prst="straightConnector1">
               <a:avLst/>
@@ -6073,6 +5610,173 @@
           </p:style>
         </p:cxnSp>
       </p:grpSp>
+      <p:cxnSp>
+        <p:nvCxnSpPr>
+          <p:cNvPr id="64" name="Straight Arrow Connector 63">
+            <a:extLst>
+              <a:ext uri="{FF2B5EF4-FFF2-40B4-BE49-F238E27FC236}">
+                <a16:creationId xmlns:a16="http://schemas.microsoft.com/office/drawing/2014/main" id="{5B735C47-4C63-359E-0E35-5A644A4BD8B1}"/>
+              </a:ext>
+            </a:extLst>
+          </p:cNvPr>
+          <p:cNvCxnSpPr>
+            <a:cxnSpLocks/>
+            <a:stCxn id="85" idx="2"/>
+          </p:cNvCxnSpPr>
+          <p:nvPr/>
+        </p:nvCxnSpPr>
+        <p:spPr>
+          <a:xfrm>
+            <a:off x="4754964" y="8346172"/>
+            <a:ext cx="0" cy="640068"/>
+          </a:xfrm>
+          <a:prstGeom prst="straightConnector1">
+            <a:avLst/>
+          </a:prstGeom>
+          <a:ln>
+            <a:tailEnd type="triangle"/>
+          </a:ln>
+        </p:spPr>
+        <p:style>
+          <a:lnRef idx="2">
+            <a:schemeClr val="accent1"/>
+          </a:lnRef>
+          <a:fillRef idx="0">
+            <a:schemeClr val="accent1"/>
+          </a:fillRef>
+          <a:effectRef idx="1">
+            <a:schemeClr val="accent1"/>
+          </a:effectRef>
+          <a:fontRef idx="minor">
+            <a:schemeClr val="tx1"/>
+          </a:fontRef>
+        </p:style>
+      </p:cxnSp>
+      <p:sp>
+        <p:nvSpPr>
+          <p:cNvPr id="72" name="Rectangle 71">
+            <a:extLst>
+              <a:ext uri="{FF2B5EF4-FFF2-40B4-BE49-F238E27FC236}">
+                <a16:creationId xmlns:a16="http://schemas.microsoft.com/office/drawing/2014/main" id="{2CF745F4-B990-9886-0123-FF5A52BC5CA8}"/>
+              </a:ext>
+            </a:extLst>
+          </p:cNvPr>
+          <p:cNvSpPr/>
+          <p:nvPr/>
+        </p:nvSpPr>
+        <p:spPr>
+          <a:xfrm>
+            <a:off x="9510684" y="6058515"/>
+            <a:ext cx="7851045" cy="1419465"/>
+          </a:xfrm>
+          <a:prstGeom prst="rect">
+            <a:avLst/>
+          </a:prstGeom>
+          <a:noFill/>
+        </p:spPr>
+        <p:style>
+          <a:lnRef idx="2">
+            <a:schemeClr val="accent1">
+              <a:shade val="15000"/>
+            </a:schemeClr>
+          </a:lnRef>
+          <a:fillRef idx="1">
+            <a:schemeClr val="accent1"/>
+          </a:fillRef>
+          <a:effectRef idx="0">
+            <a:schemeClr val="accent1"/>
+          </a:effectRef>
+          <a:fontRef idx="minor">
+            <a:schemeClr val="lt1"/>
+          </a:fontRef>
+        </p:style>
+        <p:txBody>
+          <a:bodyPr rtlCol="0" anchor="ctr"/>
+          <a:lstStyle/>
+          <a:p>
+            <a:pPr algn="ctr"/>
+            <a:endParaRPr lang="en-US" dirty="0"/>
+          </a:p>
+        </p:txBody>
+      </p:sp>
+      <p:sp>
+        <p:nvSpPr>
+          <p:cNvPr id="73" name="TextBox 72">
+            <a:extLst>
+              <a:ext uri="{FF2B5EF4-FFF2-40B4-BE49-F238E27FC236}">
+                <a16:creationId xmlns:a16="http://schemas.microsoft.com/office/drawing/2014/main" id="{FECF45F6-F0F4-7D91-2F85-1F5424FA2870}"/>
+              </a:ext>
+            </a:extLst>
+          </p:cNvPr>
+          <p:cNvSpPr txBox="1"/>
+          <p:nvPr/>
+        </p:nvSpPr>
+        <p:spPr>
+          <a:xfrm>
+            <a:off x="9510685" y="5601944"/>
+            <a:ext cx="3344905" cy="369332"/>
+          </a:xfrm>
+          <a:prstGeom prst="rect">
+            <a:avLst/>
+          </a:prstGeom>
+          <a:noFill/>
+        </p:spPr>
+        <p:txBody>
+          <a:bodyPr wrap="square" rtlCol="0">
+            <a:spAutoFit/>
+          </a:bodyPr>
+          <a:lstStyle/>
+          <a:p>
+            <a:r>
+              <a:rPr lang="en-US" b="1" dirty="0"/>
+              <a:t>Validate model</a:t>
+            </a:r>
+          </a:p>
+        </p:txBody>
+      </p:sp>
+      <p:cxnSp>
+        <p:nvCxnSpPr>
+          <p:cNvPr id="81" name="Straight Arrow Connector 80">
+            <a:extLst>
+              <a:ext uri="{FF2B5EF4-FFF2-40B4-BE49-F238E27FC236}">
+                <a16:creationId xmlns:a16="http://schemas.microsoft.com/office/drawing/2014/main" id="{A1982890-0315-3644-E0C1-A74768243CE9}"/>
+              </a:ext>
+            </a:extLst>
+          </p:cNvPr>
+          <p:cNvCxnSpPr>
+            <a:cxnSpLocks/>
+            <a:stCxn id="19" idx="2"/>
+            <a:endCxn id="119" idx="0"/>
+          </p:cNvCxnSpPr>
+          <p:nvPr/>
+        </p:nvCxnSpPr>
+        <p:spPr>
+          <a:xfrm flipH="1">
+            <a:off x="13436207" y="3976396"/>
+            <a:ext cx="1" cy="500844"/>
+          </a:xfrm>
+          <a:prstGeom prst="straightConnector1">
+            <a:avLst/>
+          </a:prstGeom>
+          <a:ln>
+            <a:tailEnd type="triangle"/>
+          </a:ln>
+        </p:spPr>
+        <p:style>
+          <a:lnRef idx="2">
+            <a:schemeClr val="accent1"/>
+          </a:lnRef>
+          <a:fillRef idx="0">
+            <a:schemeClr val="accent1"/>
+          </a:fillRef>
+          <a:effectRef idx="1">
+            <a:schemeClr val="accent1"/>
+          </a:effectRef>
+          <a:fontRef idx="minor">
+            <a:schemeClr val="tx1"/>
+          </a:fontRef>
+        </p:style>
+      </p:cxnSp>
     </p:spTree>
     <p:extLst>
       <p:ext uri="{BB962C8B-B14F-4D97-AF65-F5344CB8AC3E}">
